--- a/Prentation_Exam.pptx
+++ b/Prentation_Exam.pptx
@@ -5,14 +5,13 @@
     <p:sldMasterId id="2147483648" r:id="rId1"/>
   </p:sldMasterIdLst>
   <p:notesMasterIdLst>
-    <p:notesMasterId r:id="rId7"/>
+    <p:notesMasterId r:id="rId6"/>
   </p:notesMasterIdLst>
   <p:sldIdLst>
     <p:sldId id="256" r:id="rId2"/>
-    <p:sldId id="257" r:id="rId3"/>
-    <p:sldId id="258" r:id="rId4"/>
-    <p:sldId id="259" r:id="rId5"/>
-    <p:sldId id="260" r:id="rId6"/>
+    <p:sldId id="258" r:id="rId3"/>
+    <p:sldId id="259" r:id="rId4"/>
+    <p:sldId id="260" r:id="rId5"/>
   </p:sldIdLst>
   <p:sldSz cx="12192000" cy="6858000"/>
   <p:notesSz cx="6858000" cy="9144000"/>
@@ -201,7 +200,7 @@
           <a:p>
             <a:fld id="{2889C7EF-6036-44D0-AC86-3AB4B1176B1B}" type="datetimeFigureOut">
               <a:rPr lang="fr-FR" smtClean="0"/>
-              <a:t>10/06/2024</a:t>
+              <a:t>12/06/2024</a:t>
             </a:fld>
             <a:endParaRPr lang="fr-FR"/>
           </a:p>
@@ -359,7 +358,7 @@
           <a:p>
             <a:fld id="{B43D5660-3C79-49B3-A860-FC3C1F08A73A}" type="slidenum">
               <a:rPr lang="fr-FR" smtClean="0"/>
-              <a:t>‹N°›</a:t>
+              <a:t>‹#›</a:t>
             </a:fld>
             <a:endParaRPr lang="fr-FR"/>
           </a:p>
@@ -512,19 +511,7 @@
           <a:bodyPr/>
           <a:lstStyle/>
           <a:p>
-            <a:r>
-              <a:rPr lang="fr-FR" dirty="0" err="1"/>
-              <a:t>History</a:t>
-            </a:r>
-            <a:r>
-              <a:rPr lang="fr-FR" dirty="0"/>
-              <a:t> of </a:t>
-            </a:r>
-            <a:r>
-              <a:rPr lang="fr-FR" dirty="0" err="1"/>
-              <a:t>sawmills</a:t>
-            </a:r>
-            <a:endParaRPr lang="fr-FR" dirty="0"/>
+            <a:endParaRPr lang="fr-FR"/>
           </a:p>
         </p:txBody>
       </p:sp>
@@ -546,90 +533,6 @@
             <a:fld id="{B43D5660-3C79-49B3-A860-FC3C1F08A73A}" type="slidenum">
               <a:rPr lang="fr-FR" smtClean="0"/>
               <a:t>2</a:t>
-            </a:fld>
-            <a:endParaRPr lang="fr-FR"/>
-          </a:p>
-        </p:txBody>
-      </p:sp>
-    </p:spTree>
-    <p:extLst>
-      <p:ext uri="{BB962C8B-B14F-4D97-AF65-F5344CB8AC3E}">
-        <p14:creationId xmlns:p14="http://schemas.microsoft.com/office/powerpoint/2010/main" val="1375088482"/>
-      </p:ext>
-    </p:extLst>
-  </p:cSld>
-  <p:clrMapOvr>
-    <a:masterClrMapping/>
-  </p:clrMapOvr>
-</p:notes>
-</file>
-
-<file path=ppt/notesSlides/notesSlide2.xml><?xml version="1.0" encoding="utf-8"?>
-<p:notes xmlns:a="http://schemas.openxmlformats.org/drawingml/2006/main" xmlns:r="http://schemas.openxmlformats.org/officeDocument/2006/relationships" xmlns:p="http://schemas.openxmlformats.org/presentationml/2006/main">
-  <p:cSld>
-    <p:spTree>
-      <p:nvGrpSpPr>
-        <p:cNvPr id="1" name=""/>
-        <p:cNvGrpSpPr/>
-        <p:nvPr/>
-      </p:nvGrpSpPr>
-      <p:grpSpPr>
-        <a:xfrm>
-          <a:off x="0" y="0"/>
-          <a:ext cx="0" cy="0"/>
-          <a:chOff x="0" y="0"/>
-          <a:chExt cx="0" cy="0"/>
-        </a:xfrm>
-      </p:grpSpPr>
-      <p:sp>
-        <p:nvSpPr>
-          <p:cNvPr id="2" name="Espace réservé de l'image des diapositives 1"/>
-          <p:cNvSpPr>
-            <a:spLocks noGrp="1" noRot="1" noChangeAspect="1"/>
-          </p:cNvSpPr>
-          <p:nvPr>
-            <p:ph type="sldImg"/>
-          </p:nvPr>
-        </p:nvSpPr>
-        <p:spPr/>
-      </p:sp>
-      <p:sp>
-        <p:nvSpPr>
-          <p:cNvPr id="3" name="Espace réservé des notes 2"/>
-          <p:cNvSpPr>
-            <a:spLocks noGrp="1"/>
-          </p:cNvSpPr>
-          <p:nvPr>
-            <p:ph type="body" idx="1"/>
-          </p:nvPr>
-        </p:nvSpPr>
-        <p:spPr/>
-        <p:txBody>
-          <a:bodyPr/>
-          <a:lstStyle/>
-          <a:p>
-            <a:endParaRPr lang="fr-FR"/>
-          </a:p>
-        </p:txBody>
-      </p:sp>
-      <p:sp>
-        <p:nvSpPr>
-          <p:cNvPr id="4" name="Espace réservé du numéro de diapositive 3"/>
-          <p:cNvSpPr>
-            <a:spLocks noGrp="1"/>
-          </p:cNvSpPr>
-          <p:nvPr>
-            <p:ph type="sldNum" sz="quarter" idx="5"/>
-          </p:nvPr>
-        </p:nvSpPr>
-        <p:spPr/>
-        <p:txBody>
-          <a:bodyPr/>
-          <a:lstStyle/>
-          <a:p>
-            <a:fld id="{B43D5660-3C79-49B3-A860-FC3C1F08A73A}" type="slidenum">
-              <a:rPr lang="fr-FR" smtClean="0"/>
-              <a:t>3</a:t>
             </a:fld>
             <a:endParaRPr lang="fr-FR"/>
           </a:p>
@@ -795,7 +698,7 @@
           <a:p>
             <a:fld id="{ED65F2D9-4C3B-4AE2-BE24-365B36283484}" type="datetimeFigureOut">
               <a:rPr lang="fr-FR" smtClean="0"/>
-              <a:t>10/06/2024</a:t>
+              <a:t>12/06/2024</a:t>
             </a:fld>
             <a:endParaRPr lang="fr-FR"/>
           </a:p>
@@ -849,7 +752,7 @@
           <a:p>
             <a:fld id="{0E37F4D5-81E5-4699-B673-2B62FB09E32A}" type="slidenum">
               <a:rPr lang="fr-FR" smtClean="0"/>
-              <a:t>‹N°›</a:t>
+              <a:t>‹#›</a:t>
             </a:fld>
             <a:endParaRPr lang="fr-FR"/>
           </a:p>
@@ -993,7 +896,7 @@
           <a:p>
             <a:fld id="{ED65F2D9-4C3B-4AE2-BE24-365B36283484}" type="datetimeFigureOut">
               <a:rPr lang="fr-FR" smtClean="0"/>
-              <a:t>10/06/2024</a:t>
+              <a:t>12/06/2024</a:t>
             </a:fld>
             <a:endParaRPr lang="fr-FR"/>
           </a:p>
@@ -1047,7 +950,7 @@
           <a:p>
             <a:fld id="{0E37F4D5-81E5-4699-B673-2B62FB09E32A}" type="slidenum">
               <a:rPr lang="fr-FR" smtClean="0"/>
-              <a:t>‹N°›</a:t>
+              <a:t>‹#›</a:t>
             </a:fld>
             <a:endParaRPr lang="fr-FR"/>
           </a:p>
@@ -1201,7 +1104,7 @@
           <a:p>
             <a:fld id="{ED65F2D9-4C3B-4AE2-BE24-365B36283484}" type="datetimeFigureOut">
               <a:rPr lang="fr-FR" smtClean="0"/>
-              <a:t>10/06/2024</a:t>
+              <a:t>12/06/2024</a:t>
             </a:fld>
             <a:endParaRPr lang="fr-FR"/>
           </a:p>
@@ -1255,7 +1158,7 @@
           <a:p>
             <a:fld id="{0E37F4D5-81E5-4699-B673-2B62FB09E32A}" type="slidenum">
               <a:rPr lang="fr-FR" smtClean="0"/>
-              <a:t>‹N°›</a:t>
+              <a:t>‹#›</a:t>
             </a:fld>
             <a:endParaRPr lang="fr-FR"/>
           </a:p>
@@ -1399,7 +1302,7 @@
           <a:p>
             <a:fld id="{ED65F2D9-4C3B-4AE2-BE24-365B36283484}" type="datetimeFigureOut">
               <a:rPr lang="fr-FR" smtClean="0"/>
-              <a:t>10/06/2024</a:t>
+              <a:t>12/06/2024</a:t>
             </a:fld>
             <a:endParaRPr lang="fr-FR"/>
           </a:p>
@@ -1453,7 +1356,7 @@
           <a:p>
             <a:fld id="{0E37F4D5-81E5-4699-B673-2B62FB09E32A}" type="slidenum">
               <a:rPr lang="fr-FR" smtClean="0"/>
-              <a:t>‹N°›</a:t>
+              <a:t>‹#›</a:t>
             </a:fld>
             <a:endParaRPr lang="fr-FR"/>
           </a:p>
@@ -1674,7 +1577,7 @@
           <a:p>
             <a:fld id="{ED65F2D9-4C3B-4AE2-BE24-365B36283484}" type="datetimeFigureOut">
               <a:rPr lang="fr-FR" smtClean="0"/>
-              <a:t>10/06/2024</a:t>
+              <a:t>12/06/2024</a:t>
             </a:fld>
             <a:endParaRPr lang="fr-FR"/>
           </a:p>
@@ -1728,7 +1631,7 @@
           <a:p>
             <a:fld id="{0E37F4D5-81E5-4699-B673-2B62FB09E32A}" type="slidenum">
               <a:rPr lang="fr-FR" smtClean="0"/>
-              <a:t>‹N°›</a:t>
+              <a:t>‹#›</a:t>
             </a:fld>
             <a:endParaRPr lang="fr-FR"/>
           </a:p>
@@ -1939,7 +1842,7 @@
           <a:p>
             <a:fld id="{ED65F2D9-4C3B-4AE2-BE24-365B36283484}" type="datetimeFigureOut">
               <a:rPr lang="fr-FR" smtClean="0"/>
-              <a:t>10/06/2024</a:t>
+              <a:t>12/06/2024</a:t>
             </a:fld>
             <a:endParaRPr lang="fr-FR"/>
           </a:p>
@@ -1993,7 +1896,7 @@
           <a:p>
             <a:fld id="{0E37F4D5-81E5-4699-B673-2B62FB09E32A}" type="slidenum">
               <a:rPr lang="fr-FR" smtClean="0"/>
-              <a:t>‹N°›</a:t>
+              <a:t>‹#›</a:t>
             </a:fld>
             <a:endParaRPr lang="fr-FR"/>
           </a:p>
@@ -2351,7 +2254,7 @@
           <a:p>
             <a:fld id="{ED65F2D9-4C3B-4AE2-BE24-365B36283484}" type="datetimeFigureOut">
               <a:rPr lang="fr-FR" smtClean="0"/>
-              <a:t>10/06/2024</a:t>
+              <a:t>12/06/2024</a:t>
             </a:fld>
             <a:endParaRPr lang="fr-FR"/>
           </a:p>
@@ -2405,7 +2308,7 @@
           <a:p>
             <a:fld id="{0E37F4D5-81E5-4699-B673-2B62FB09E32A}" type="slidenum">
               <a:rPr lang="fr-FR" smtClean="0"/>
-              <a:t>‹N°›</a:t>
+              <a:t>‹#›</a:t>
             </a:fld>
             <a:endParaRPr lang="fr-FR"/>
           </a:p>
@@ -2492,7 +2395,7 @@
           <a:p>
             <a:fld id="{ED65F2D9-4C3B-4AE2-BE24-365B36283484}" type="datetimeFigureOut">
               <a:rPr lang="fr-FR" smtClean="0"/>
-              <a:t>10/06/2024</a:t>
+              <a:t>12/06/2024</a:t>
             </a:fld>
             <a:endParaRPr lang="fr-FR"/>
           </a:p>
@@ -2546,7 +2449,7 @@
           <a:p>
             <a:fld id="{0E37F4D5-81E5-4699-B673-2B62FB09E32A}" type="slidenum">
               <a:rPr lang="fr-FR" smtClean="0"/>
-              <a:t>‹N°›</a:t>
+              <a:t>‹#›</a:t>
             </a:fld>
             <a:endParaRPr lang="fr-FR"/>
           </a:p>
@@ -2605,7 +2508,7 @@
           <a:p>
             <a:fld id="{ED65F2D9-4C3B-4AE2-BE24-365B36283484}" type="datetimeFigureOut">
               <a:rPr lang="fr-FR" smtClean="0"/>
-              <a:t>10/06/2024</a:t>
+              <a:t>12/06/2024</a:t>
             </a:fld>
             <a:endParaRPr lang="fr-FR"/>
           </a:p>
@@ -2659,7 +2562,7 @@
           <a:p>
             <a:fld id="{0E37F4D5-81E5-4699-B673-2B62FB09E32A}" type="slidenum">
               <a:rPr lang="fr-FR" smtClean="0"/>
-              <a:t>‹N°›</a:t>
+              <a:t>‹#›</a:t>
             </a:fld>
             <a:endParaRPr lang="fr-FR"/>
           </a:p>
@@ -2916,7 +2819,7 @@
           <a:p>
             <a:fld id="{ED65F2D9-4C3B-4AE2-BE24-365B36283484}" type="datetimeFigureOut">
               <a:rPr lang="fr-FR" smtClean="0"/>
-              <a:t>10/06/2024</a:t>
+              <a:t>12/06/2024</a:t>
             </a:fld>
             <a:endParaRPr lang="fr-FR"/>
           </a:p>
@@ -2970,7 +2873,7 @@
           <a:p>
             <a:fld id="{0E37F4D5-81E5-4699-B673-2B62FB09E32A}" type="slidenum">
               <a:rPr lang="fr-FR" smtClean="0"/>
-              <a:t>‹N°›</a:t>
+              <a:t>‹#›</a:t>
             </a:fld>
             <a:endParaRPr lang="fr-FR"/>
           </a:p>
@@ -3204,7 +3107,7 @@
           <a:p>
             <a:fld id="{ED65F2D9-4C3B-4AE2-BE24-365B36283484}" type="datetimeFigureOut">
               <a:rPr lang="fr-FR" smtClean="0"/>
-              <a:t>10/06/2024</a:t>
+              <a:t>12/06/2024</a:t>
             </a:fld>
             <a:endParaRPr lang="fr-FR"/>
           </a:p>
@@ -3258,7 +3161,7 @@
           <a:p>
             <a:fld id="{0E37F4D5-81E5-4699-B673-2B62FB09E32A}" type="slidenum">
               <a:rPr lang="fr-FR" smtClean="0"/>
-              <a:t>‹N°›</a:t>
+              <a:t>‹#›</a:t>
             </a:fld>
             <a:endParaRPr lang="fr-FR"/>
           </a:p>
@@ -3445,7 +3348,7 @@
           <a:p>
             <a:fld id="{ED65F2D9-4C3B-4AE2-BE24-365B36283484}" type="datetimeFigureOut">
               <a:rPr lang="fr-FR" smtClean="0"/>
-              <a:t>10/06/2024</a:t>
+              <a:t>12/06/2024</a:t>
             </a:fld>
             <a:endParaRPr lang="fr-FR"/>
           </a:p>
@@ -3535,7 +3438,7 @@
           <a:p>
             <a:fld id="{0E37F4D5-81E5-4699-B673-2B62FB09E32A}" type="slidenum">
               <a:rPr lang="fr-FR" smtClean="0"/>
-              <a:t>‹N°›</a:t>
+              <a:t>‹#›</a:t>
             </a:fld>
             <a:endParaRPr lang="fr-FR"/>
           </a:p>
@@ -4180,10 +4083,63 @@
           <a:chExt cx="0" cy="0"/>
         </a:xfrm>
       </p:grpSpPr>
+      <p:sp>
+        <p:nvSpPr>
+          <p:cNvPr id="2" name="Titre 1">
+            <a:extLst>
+              <a:ext uri="{FF2B5EF4-FFF2-40B4-BE49-F238E27FC236}">
+                <a16:creationId xmlns:a16="http://schemas.microsoft.com/office/drawing/2014/main" id="{5077C900-95F0-EDC6-7985-FD31A72445CF}"/>
+              </a:ext>
+            </a:extLst>
+          </p:cNvPr>
+          <p:cNvSpPr>
+            <a:spLocks noGrp="1"/>
+          </p:cNvSpPr>
+          <p:nvPr>
+            <p:ph type="title"/>
+          </p:nvPr>
+        </p:nvSpPr>
+        <p:spPr/>
+        <p:txBody>
+          <a:bodyPr/>
+          <a:lstStyle/>
+          <a:p>
+            <a:endParaRPr lang="fr-FR"/>
+          </a:p>
+        </p:txBody>
+      </p:sp>
+      <p:sp>
+        <p:nvSpPr>
+          <p:cNvPr id="3" name="Espace réservé du contenu 2">
+            <a:extLst>
+              <a:ext uri="{FF2B5EF4-FFF2-40B4-BE49-F238E27FC236}">
+                <a16:creationId xmlns:a16="http://schemas.microsoft.com/office/drawing/2014/main" id="{ABD477A3-C9DA-E62C-5C61-10CB62A87B30}"/>
+              </a:ext>
+            </a:extLst>
+          </p:cNvPr>
+          <p:cNvSpPr>
+            <a:spLocks noGrp="1"/>
+          </p:cNvSpPr>
+          <p:nvPr>
+            <p:ph idx="1"/>
+          </p:nvPr>
+        </p:nvSpPr>
+        <p:spPr/>
+        <p:txBody>
+          <a:bodyPr/>
+          <a:lstStyle/>
+          <a:p>
+            <a:pPr marL="0" indent="0">
+              <a:buNone/>
+            </a:pPr>
+            <a:endParaRPr lang="fr-FR" dirty="0"/>
+          </a:p>
+        </p:txBody>
+      </p:sp>
     </p:spTree>
     <p:extLst>
       <p:ext uri="{BB962C8B-B14F-4D97-AF65-F5344CB8AC3E}">
-        <p14:creationId xmlns:p14="http://schemas.microsoft.com/office/powerpoint/2010/main" val="3113256043"/>
+        <p14:creationId xmlns:p14="http://schemas.microsoft.com/office/powerpoint/2010/main" val="992364927"/>
       </p:ext>
     </p:extLst>
   </p:cSld>
@@ -4215,86 +4171,6 @@
           <p:cNvPr id="2" name="Titre 1">
             <a:extLst>
               <a:ext uri="{FF2B5EF4-FFF2-40B4-BE49-F238E27FC236}">
-                <a16:creationId xmlns:a16="http://schemas.microsoft.com/office/drawing/2014/main" id="{5077C900-95F0-EDC6-7985-FD31A72445CF}"/>
-              </a:ext>
-            </a:extLst>
-          </p:cNvPr>
-          <p:cNvSpPr>
-            <a:spLocks noGrp="1"/>
-          </p:cNvSpPr>
-          <p:nvPr>
-            <p:ph type="title"/>
-          </p:nvPr>
-        </p:nvSpPr>
-        <p:spPr/>
-        <p:txBody>
-          <a:bodyPr/>
-          <a:lstStyle/>
-          <a:p>
-            <a:endParaRPr lang="fr-FR"/>
-          </a:p>
-        </p:txBody>
-      </p:sp>
-      <p:sp>
-        <p:nvSpPr>
-          <p:cNvPr id="3" name="Espace réservé du contenu 2">
-            <a:extLst>
-              <a:ext uri="{FF2B5EF4-FFF2-40B4-BE49-F238E27FC236}">
-                <a16:creationId xmlns:a16="http://schemas.microsoft.com/office/drawing/2014/main" id="{ABD477A3-C9DA-E62C-5C61-10CB62A87B30}"/>
-              </a:ext>
-            </a:extLst>
-          </p:cNvPr>
-          <p:cNvSpPr>
-            <a:spLocks noGrp="1"/>
-          </p:cNvSpPr>
-          <p:nvPr>
-            <p:ph idx="1"/>
-          </p:nvPr>
-        </p:nvSpPr>
-        <p:spPr/>
-        <p:txBody>
-          <a:bodyPr/>
-          <a:lstStyle/>
-          <a:p>
-            <a:endParaRPr lang="fr-FR"/>
-          </a:p>
-        </p:txBody>
-      </p:sp>
-    </p:spTree>
-    <p:extLst>
-      <p:ext uri="{BB962C8B-B14F-4D97-AF65-F5344CB8AC3E}">
-        <p14:creationId xmlns:p14="http://schemas.microsoft.com/office/powerpoint/2010/main" val="992364927"/>
-      </p:ext>
-    </p:extLst>
-  </p:cSld>
-  <p:clrMapOvr>
-    <a:masterClrMapping/>
-  </p:clrMapOvr>
-</p:sld>
-</file>
-
-<file path=ppt/slides/slide4.xml><?xml version="1.0" encoding="utf-8"?>
-<p:sld xmlns:a="http://schemas.openxmlformats.org/drawingml/2006/main" xmlns:r="http://schemas.openxmlformats.org/officeDocument/2006/relationships" xmlns:p="http://schemas.openxmlformats.org/presentationml/2006/main">
-  <p:cSld>
-    <p:spTree>
-      <p:nvGrpSpPr>
-        <p:cNvPr id="1" name=""/>
-        <p:cNvGrpSpPr/>
-        <p:nvPr/>
-      </p:nvGrpSpPr>
-      <p:grpSpPr>
-        <a:xfrm>
-          <a:off x="0" y="0"/>
-          <a:ext cx="0" cy="0"/>
-          <a:chOff x="0" y="0"/>
-          <a:chExt cx="0" cy="0"/>
-        </a:xfrm>
-      </p:grpSpPr>
-      <p:sp>
-        <p:nvSpPr>
-          <p:cNvPr id="2" name="Titre 1">
-            <a:extLst>
-              <a:ext uri="{FF2B5EF4-FFF2-40B4-BE49-F238E27FC236}">
                 <a16:creationId xmlns:a16="http://schemas.microsoft.com/office/drawing/2014/main" id="{51CAD747-AE07-6A58-D746-C28120F5557A}"/>
               </a:ext>
             </a:extLst>
@@ -4353,7 +4229,7 @@
 </p:sld>
 </file>
 
-<file path=ppt/slides/slide5.xml><?xml version="1.0" encoding="utf-8"?>
+<file path=ppt/slides/slide4.xml><?xml version="1.0" encoding="utf-8"?>
 <p:sld xmlns:a="http://schemas.openxmlformats.org/drawingml/2006/main" xmlns:r="http://schemas.openxmlformats.org/officeDocument/2006/relationships" xmlns:p="http://schemas.openxmlformats.org/presentationml/2006/main">
   <p:cSld>
     <p:spTree>
